--- a/reference/ONDA_XX-Survival Curve.pptx
+++ b/reference/ONDA_XX-Survival Curve.pptx
@@ -2250,9 +2250,9 @@
         <p:grpSpPr>
           <a:xfrm>
             <a:off x="914400" y="914400"/>
-            <a:ext cx="5486400" cy="3657600"/>
+            <a:ext cx="5303520" cy="4206240"/>
             <a:chOff x="914400" y="914400"/>
-            <a:chExt cx="5486400" cy="3657600"/>
+            <a:chExt cx="5303520" cy="4206240"/>
           </a:xfrm>
         </p:grpSpPr>
         <p:sp>
@@ -2264,7 +2264,7 @@
           <p:spPr>
             <a:xfrm>
               <a:off x="914400" y="914400"/>
-              <a:ext cx="5486400" cy="3657600"/>
+              <a:ext cx="5303520" cy="4206240"/>
             </a:xfrm>
             <a:prstGeom prst="rect">
               <a:avLst/>
@@ -2299,7 +2299,7 @@
           <p:spPr>
             <a:xfrm>
               <a:off x="914400" y="914400"/>
-              <a:ext cx="5486400" cy="3657600"/>
+              <a:ext cx="5303520" cy="4206240"/>
             </a:xfrm>
             <a:prstGeom prst="rect">
               <a:avLst/>
@@ -2333,8 +2333,8 @@
           </p:nvSpPr>
           <p:spPr>
             <a:xfrm>
-              <a:off x="1531823" y="983989"/>
-              <a:ext cx="4130307" cy="3185376"/>
+              <a:off x="1531664" y="983989"/>
+              <a:ext cx="3968069" cy="3733996"/>
             </a:xfrm>
             <a:prstGeom prst="rect">
               <a:avLst/>
@@ -2359,21 +2359,21 @@
           </p:nvSpPr>
           <p:spPr>
             <a:xfrm>
-              <a:off x="1531823" y="4014735"/>
-              <a:ext cx="4130307" cy="0"/>
+              <a:off x="1531664" y="4533134"/>
+              <a:ext cx="3968069" cy="0"/>
             </a:xfrm>
             <a:custGeom>
               <a:avLst/>
               <a:pathLst>
-                <a:path w="4130307" h="0">
+                <a:path w="3968069" h="0">
                   <a:moveTo>
                     <a:pt x="0" y="0"/>
                   </a:moveTo>
                   <a:lnTo>
-                    <a:pt x="4130307" y="0"/>
-                  </a:lnTo>
-                  <a:lnTo>
-                    <a:pt x="4130307" y="0"/>
+                    <a:pt x="3968069" y="0"/>
+                  </a:lnTo>
+                  <a:lnTo>
+                    <a:pt x="3968069" y="0"/>
                   </a:lnTo>
                 </a:path>
               </a:pathLst>
@@ -2402,21 +2402,21 @@
           </p:nvSpPr>
           <p:spPr>
             <a:xfrm>
-              <a:off x="1531823" y="3705475"/>
-              <a:ext cx="4130307" cy="0"/>
+              <a:off x="1531664" y="4163431"/>
+              <a:ext cx="3968069" cy="0"/>
             </a:xfrm>
             <a:custGeom>
               <a:avLst/>
               <a:pathLst>
-                <a:path w="4130307" h="0">
+                <a:path w="3968069" h="0">
                   <a:moveTo>
                     <a:pt x="0" y="0"/>
                   </a:moveTo>
                   <a:lnTo>
-                    <a:pt x="4130307" y="0"/>
-                  </a:lnTo>
-                  <a:lnTo>
-                    <a:pt x="4130307" y="0"/>
+                    <a:pt x="3968069" y="0"/>
+                  </a:lnTo>
+                  <a:lnTo>
+                    <a:pt x="3968069" y="0"/>
                   </a:lnTo>
                 </a:path>
               </a:pathLst>
@@ -2445,21 +2445,21 @@
           </p:nvSpPr>
           <p:spPr>
             <a:xfrm>
-              <a:off x="1531823" y="3396215"/>
-              <a:ext cx="4130307" cy="0"/>
+              <a:off x="1531664" y="3793728"/>
+              <a:ext cx="3968069" cy="0"/>
             </a:xfrm>
             <a:custGeom>
               <a:avLst/>
               <a:pathLst>
-                <a:path w="4130307" h="0">
+                <a:path w="3968069" h="0">
                   <a:moveTo>
                     <a:pt x="0" y="0"/>
                   </a:moveTo>
                   <a:lnTo>
-                    <a:pt x="4130307" y="0"/>
-                  </a:lnTo>
-                  <a:lnTo>
-                    <a:pt x="4130307" y="0"/>
+                    <a:pt x="3968069" y="0"/>
+                  </a:lnTo>
+                  <a:lnTo>
+                    <a:pt x="3968069" y="0"/>
                   </a:lnTo>
                 </a:path>
               </a:pathLst>
@@ -2488,21 +2488,21 @@
           </p:nvSpPr>
           <p:spPr>
             <a:xfrm>
-              <a:off x="1531823" y="3086955"/>
-              <a:ext cx="4130307" cy="0"/>
+              <a:off x="1531664" y="3424026"/>
+              <a:ext cx="3968069" cy="0"/>
             </a:xfrm>
             <a:custGeom>
               <a:avLst/>
               <a:pathLst>
-                <a:path w="4130307" h="0">
+                <a:path w="3968069" h="0">
                   <a:moveTo>
                     <a:pt x="0" y="0"/>
                   </a:moveTo>
                   <a:lnTo>
-                    <a:pt x="4130307" y="0"/>
-                  </a:lnTo>
-                  <a:lnTo>
-                    <a:pt x="4130307" y="0"/>
+                    <a:pt x="3968069" y="0"/>
+                  </a:lnTo>
+                  <a:lnTo>
+                    <a:pt x="3968069" y="0"/>
                   </a:lnTo>
                 </a:path>
               </a:pathLst>
@@ -2531,21 +2531,21 @@
           </p:nvSpPr>
           <p:spPr>
             <a:xfrm>
-              <a:off x="1531823" y="2777696"/>
-              <a:ext cx="4130307" cy="0"/>
+              <a:off x="1531664" y="3054323"/>
+              <a:ext cx="3968069" cy="0"/>
             </a:xfrm>
             <a:custGeom>
               <a:avLst/>
               <a:pathLst>
-                <a:path w="4130307" h="0">
+                <a:path w="3968069" h="0">
                   <a:moveTo>
                     <a:pt x="0" y="0"/>
                   </a:moveTo>
                   <a:lnTo>
-                    <a:pt x="4130307" y="0"/>
-                  </a:lnTo>
-                  <a:lnTo>
-                    <a:pt x="4130307" y="0"/>
+                    <a:pt x="3968069" y="0"/>
+                  </a:lnTo>
+                  <a:lnTo>
+                    <a:pt x="3968069" y="0"/>
                   </a:lnTo>
                 </a:path>
               </a:pathLst>
@@ -2574,21 +2574,21 @@
           </p:nvSpPr>
           <p:spPr>
             <a:xfrm>
-              <a:off x="1531823" y="2468436"/>
-              <a:ext cx="4130307" cy="0"/>
+              <a:off x="1531664" y="2684621"/>
+              <a:ext cx="3968069" cy="0"/>
             </a:xfrm>
             <a:custGeom>
               <a:avLst/>
               <a:pathLst>
-                <a:path w="4130307" h="0">
+                <a:path w="3968069" h="0">
                   <a:moveTo>
                     <a:pt x="0" y="0"/>
                   </a:moveTo>
                   <a:lnTo>
-                    <a:pt x="4130307" y="0"/>
-                  </a:lnTo>
-                  <a:lnTo>
-                    <a:pt x="4130307" y="0"/>
+                    <a:pt x="3968069" y="0"/>
+                  </a:lnTo>
+                  <a:lnTo>
+                    <a:pt x="3968069" y="0"/>
                   </a:lnTo>
                 </a:path>
               </a:pathLst>
@@ -2617,21 +2617,21 @@
           </p:nvSpPr>
           <p:spPr>
             <a:xfrm>
-              <a:off x="1531823" y="2159176"/>
-              <a:ext cx="4130307" cy="0"/>
+              <a:off x="1531664" y="2314918"/>
+              <a:ext cx="3968069" cy="0"/>
             </a:xfrm>
             <a:custGeom>
               <a:avLst/>
               <a:pathLst>
-                <a:path w="4130307" h="0">
+                <a:path w="3968069" h="0">
                   <a:moveTo>
                     <a:pt x="0" y="0"/>
                   </a:moveTo>
                   <a:lnTo>
-                    <a:pt x="4130307" y="0"/>
-                  </a:lnTo>
-                  <a:lnTo>
-                    <a:pt x="4130307" y="0"/>
+                    <a:pt x="3968069" y="0"/>
+                  </a:lnTo>
+                  <a:lnTo>
+                    <a:pt x="3968069" y="0"/>
                   </a:lnTo>
                 </a:path>
               </a:pathLst>
@@ -2660,21 +2660,21 @@
           </p:nvSpPr>
           <p:spPr>
             <a:xfrm>
-              <a:off x="1531823" y="1849916"/>
-              <a:ext cx="4130307" cy="0"/>
+              <a:off x="1531664" y="1945215"/>
+              <a:ext cx="3968069" cy="0"/>
             </a:xfrm>
             <a:custGeom>
               <a:avLst/>
               <a:pathLst>
-                <a:path w="4130307" h="0">
+                <a:path w="3968069" h="0">
                   <a:moveTo>
                     <a:pt x="0" y="0"/>
                   </a:moveTo>
                   <a:lnTo>
-                    <a:pt x="4130307" y="0"/>
-                  </a:lnTo>
-                  <a:lnTo>
-                    <a:pt x="4130307" y="0"/>
+                    <a:pt x="3968069" y="0"/>
+                  </a:lnTo>
+                  <a:lnTo>
+                    <a:pt x="3968069" y="0"/>
                   </a:lnTo>
                 </a:path>
               </a:pathLst>
@@ -2703,21 +2703,21 @@
           </p:nvSpPr>
           <p:spPr>
             <a:xfrm>
-              <a:off x="1531823" y="1540656"/>
-              <a:ext cx="4130307" cy="0"/>
+              <a:off x="1531664" y="1575513"/>
+              <a:ext cx="3968069" cy="0"/>
             </a:xfrm>
             <a:custGeom>
               <a:avLst/>
               <a:pathLst>
-                <a:path w="4130307" h="0">
+                <a:path w="3968069" h="0">
                   <a:moveTo>
                     <a:pt x="0" y="0"/>
                   </a:moveTo>
                   <a:lnTo>
-                    <a:pt x="4130307" y="0"/>
-                  </a:lnTo>
-                  <a:lnTo>
-                    <a:pt x="4130307" y="0"/>
+                    <a:pt x="3968069" y="0"/>
+                  </a:lnTo>
+                  <a:lnTo>
+                    <a:pt x="3968069" y="0"/>
                   </a:lnTo>
                 </a:path>
               </a:pathLst>
@@ -2746,21 +2746,21 @@
           </p:nvSpPr>
           <p:spPr>
             <a:xfrm>
-              <a:off x="1531823" y="1231396"/>
-              <a:ext cx="4130307" cy="0"/>
+              <a:off x="1531664" y="1205810"/>
+              <a:ext cx="3968069" cy="0"/>
             </a:xfrm>
             <a:custGeom>
               <a:avLst/>
               <a:pathLst>
-                <a:path w="4130307" h="0">
+                <a:path w="3968069" h="0">
                   <a:moveTo>
                     <a:pt x="0" y="0"/>
                   </a:moveTo>
                   <a:lnTo>
-                    <a:pt x="4130307" y="0"/>
-                  </a:lnTo>
-                  <a:lnTo>
-                    <a:pt x="4130307" y="0"/>
+                    <a:pt x="3968069" y="0"/>
+                  </a:lnTo>
+                  <a:lnTo>
+                    <a:pt x="3968069" y="0"/>
                   </a:lnTo>
                 </a:path>
               </a:pathLst>
@@ -2789,15 +2789,15 @@
           </p:nvSpPr>
           <p:spPr>
             <a:xfrm>
-              <a:off x="1757112" y="983989"/>
-              <a:ext cx="0" cy="3185376"/>
+              <a:off x="1748104" y="983989"/>
+              <a:ext cx="0" cy="3733996"/>
             </a:xfrm>
             <a:custGeom>
               <a:avLst/>
               <a:pathLst>
-                <a:path w="0" h="3185376">
+                <a:path w="0" h="3733996">
                   <a:moveTo>
-                    <a:pt x="0" y="3185376"/>
+                    <a:pt x="0" y="3733996"/>
                   </a:moveTo>
                   <a:lnTo>
                     <a:pt x="0" y="0"/>
@@ -2832,15 +2832,15 @@
           </p:nvSpPr>
           <p:spPr>
             <a:xfrm>
-              <a:off x="2207691" y="983989"/>
-              <a:ext cx="0" cy="3185376"/>
+              <a:off x="2180984" y="983989"/>
+              <a:ext cx="0" cy="3733996"/>
             </a:xfrm>
             <a:custGeom>
               <a:avLst/>
               <a:pathLst>
-                <a:path w="0" h="3185376">
+                <a:path w="0" h="3733996">
                   <a:moveTo>
-                    <a:pt x="0" y="3185376"/>
+                    <a:pt x="0" y="3733996"/>
                   </a:moveTo>
                   <a:lnTo>
                     <a:pt x="0" y="0"/>
@@ -2875,15 +2875,15 @@
           </p:nvSpPr>
           <p:spPr>
             <a:xfrm>
-              <a:off x="2658271" y="983989"/>
-              <a:ext cx="0" cy="3185376"/>
+              <a:off x="2613865" y="983989"/>
+              <a:ext cx="0" cy="3733996"/>
             </a:xfrm>
             <a:custGeom>
               <a:avLst/>
               <a:pathLst>
-                <a:path w="0" h="3185376">
+                <a:path w="0" h="3733996">
                   <a:moveTo>
-                    <a:pt x="0" y="3185376"/>
+                    <a:pt x="0" y="3733996"/>
                   </a:moveTo>
                   <a:lnTo>
                     <a:pt x="0" y="0"/>
@@ -2918,15 +2918,15 @@
           </p:nvSpPr>
           <p:spPr>
             <a:xfrm>
-              <a:off x="3108850" y="983989"/>
-              <a:ext cx="0" cy="3185376"/>
+              <a:off x="3046745" y="983989"/>
+              <a:ext cx="0" cy="3733996"/>
             </a:xfrm>
             <a:custGeom>
               <a:avLst/>
               <a:pathLst>
-                <a:path w="0" h="3185376">
+                <a:path w="0" h="3733996">
                   <a:moveTo>
-                    <a:pt x="0" y="3185376"/>
+                    <a:pt x="0" y="3733996"/>
                   </a:moveTo>
                   <a:lnTo>
                     <a:pt x="0" y="0"/>
@@ -2961,15 +2961,15 @@
           </p:nvSpPr>
           <p:spPr>
             <a:xfrm>
-              <a:off x="3559429" y="983989"/>
-              <a:ext cx="0" cy="3185376"/>
+              <a:off x="3479625" y="983989"/>
+              <a:ext cx="0" cy="3733996"/>
             </a:xfrm>
             <a:custGeom>
               <a:avLst/>
               <a:pathLst>
-                <a:path w="0" h="3185376">
+                <a:path w="0" h="3733996">
                   <a:moveTo>
-                    <a:pt x="0" y="3185376"/>
+                    <a:pt x="0" y="3733996"/>
                   </a:moveTo>
                   <a:lnTo>
                     <a:pt x="0" y="0"/>
@@ -3004,15 +3004,15 @@
           </p:nvSpPr>
           <p:spPr>
             <a:xfrm>
-              <a:off x="4010008" y="983989"/>
-              <a:ext cx="0" cy="3185376"/>
+              <a:off x="3912506" y="983989"/>
+              <a:ext cx="0" cy="3733996"/>
             </a:xfrm>
             <a:custGeom>
               <a:avLst/>
               <a:pathLst>
-                <a:path w="0" h="3185376">
+                <a:path w="0" h="3733996">
                   <a:moveTo>
-                    <a:pt x="0" y="3185376"/>
+                    <a:pt x="0" y="3733996"/>
                   </a:moveTo>
                   <a:lnTo>
                     <a:pt x="0" y="0"/>
@@ -3047,15 +3047,15 @@
           </p:nvSpPr>
           <p:spPr>
             <a:xfrm>
-              <a:off x="4460587" y="983989"/>
-              <a:ext cx="0" cy="3185376"/>
+              <a:off x="4345386" y="983989"/>
+              <a:ext cx="0" cy="3733996"/>
             </a:xfrm>
             <a:custGeom>
               <a:avLst/>
               <a:pathLst>
-                <a:path w="0" h="3185376">
+                <a:path w="0" h="3733996">
                   <a:moveTo>
-                    <a:pt x="0" y="3185376"/>
+                    <a:pt x="0" y="3733996"/>
                   </a:moveTo>
                   <a:lnTo>
                     <a:pt x="0" y="0"/>
@@ -3090,15 +3090,15 @@
           </p:nvSpPr>
           <p:spPr>
             <a:xfrm>
-              <a:off x="4911166" y="983989"/>
-              <a:ext cx="0" cy="3185376"/>
+              <a:off x="4778266" y="983989"/>
+              <a:ext cx="0" cy="3733996"/>
             </a:xfrm>
             <a:custGeom>
               <a:avLst/>
               <a:pathLst>
-                <a:path w="0" h="3185376">
+                <a:path w="0" h="3733996">
                   <a:moveTo>
-                    <a:pt x="0" y="3185376"/>
+                    <a:pt x="0" y="3733996"/>
                   </a:moveTo>
                   <a:lnTo>
                     <a:pt x="0" y="0"/>
@@ -3133,15 +3133,15 @@
           </p:nvSpPr>
           <p:spPr>
             <a:xfrm>
-              <a:off x="5361745" y="983989"/>
-              <a:ext cx="0" cy="3185376"/>
+              <a:off x="5211147" y="983989"/>
+              <a:ext cx="0" cy="3733996"/>
             </a:xfrm>
             <a:custGeom>
               <a:avLst/>
               <a:pathLst>
-                <a:path w="0" h="3185376">
+                <a:path w="0" h="3733996">
                   <a:moveTo>
-                    <a:pt x="0" y="3185376"/>
+                    <a:pt x="0" y="3733996"/>
                   </a:moveTo>
                   <a:lnTo>
                     <a:pt x="0" y="0"/>
@@ -3176,21 +3176,21 @@
           </p:nvSpPr>
           <p:spPr>
             <a:xfrm>
-              <a:off x="1531823" y="4169365"/>
-              <a:ext cx="4130307" cy="0"/>
+              <a:off x="1531664" y="4717985"/>
+              <a:ext cx="3968069" cy="0"/>
             </a:xfrm>
             <a:custGeom>
               <a:avLst/>
               <a:pathLst>
-                <a:path w="4130307" h="0">
+                <a:path w="3968069" h="0">
                   <a:moveTo>
                     <a:pt x="0" y="0"/>
                   </a:moveTo>
                   <a:lnTo>
-                    <a:pt x="4130307" y="0"/>
-                  </a:lnTo>
-                  <a:lnTo>
-                    <a:pt x="4130307" y="0"/>
+                    <a:pt x="3968069" y="0"/>
+                  </a:lnTo>
+                  <a:lnTo>
+                    <a:pt x="3968069" y="0"/>
                   </a:lnTo>
                 </a:path>
               </a:pathLst>
@@ -3219,21 +3219,21 @@
           </p:nvSpPr>
           <p:spPr>
             <a:xfrm>
-              <a:off x="1531823" y="3860105"/>
-              <a:ext cx="4130307" cy="0"/>
+              <a:off x="1531664" y="4348282"/>
+              <a:ext cx="3968069" cy="0"/>
             </a:xfrm>
             <a:custGeom>
               <a:avLst/>
               <a:pathLst>
-                <a:path w="4130307" h="0">
+                <a:path w="3968069" h="0">
                   <a:moveTo>
                     <a:pt x="0" y="0"/>
                   </a:moveTo>
                   <a:lnTo>
-                    <a:pt x="4130307" y="0"/>
-                  </a:lnTo>
-                  <a:lnTo>
-                    <a:pt x="4130307" y="0"/>
+                    <a:pt x="3968069" y="0"/>
+                  </a:lnTo>
+                  <a:lnTo>
+                    <a:pt x="3968069" y="0"/>
                   </a:lnTo>
                 </a:path>
               </a:pathLst>
@@ -3262,21 +3262,21 @@
           </p:nvSpPr>
           <p:spPr>
             <a:xfrm>
-              <a:off x="1531823" y="3550845"/>
-              <a:ext cx="4130307" cy="0"/>
+              <a:off x="1531664" y="3978580"/>
+              <a:ext cx="3968069" cy="0"/>
             </a:xfrm>
             <a:custGeom>
               <a:avLst/>
               <a:pathLst>
-                <a:path w="4130307" h="0">
+                <a:path w="3968069" h="0">
                   <a:moveTo>
                     <a:pt x="0" y="0"/>
                   </a:moveTo>
                   <a:lnTo>
-                    <a:pt x="4130307" y="0"/>
-                  </a:lnTo>
-                  <a:lnTo>
-                    <a:pt x="4130307" y="0"/>
+                    <a:pt x="3968069" y="0"/>
+                  </a:lnTo>
+                  <a:lnTo>
+                    <a:pt x="3968069" y="0"/>
                   </a:lnTo>
                 </a:path>
               </a:pathLst>
@@ -3305,21 +3305,21 @@
           </p:nvSpPr>
           <p:spPr>
             <a:xfrm>
-              <a:off x="1531823" y="3241585"/>
-              <a:ext cx="4130307" cy="0"/>
+              <a:off x="1531664" y="3608877"/>
+              <a:ext cx="3968069" cy="0"/>
             </a:xfrm>
             <a:custGeom>
               <a:avLst/>
               <a:pathLst>
-                <a:path w="4130307" h="0">
+                <a:path w="3968069" h="0">
                   <a:moveTo>
                     <a:pt x="0" y="0"/>
                   </a:moveTo>
                   <a:lnTo>
-                    <a:pt x="4130307" y="0"/>
-                  </a:lnTo>
-                  <a:lnTo>
-                    <a:pt x="4130307" y="0"/>
+                    <a:pt x="3968069" y="0"/>
+                  </a:lnTo>
+                  <a:lnTo>
+                    <a:pt x="3968069" y="0"/>
                   </a:lnTo>
                 </a:path>
               </a:pathLst>
@@ -3348,21 +3348,21 @@
           </p:nvSpPr>
           <p:spPr>
             <a:xfrm>
-              <a:off x="1531823" y="2932325"/>
-              <a:ext cx="4130307" cy="0"/>
+              <a:off x="1531664" y="3239174"/>
+              <a:ext cx="3968069" cy="0"/>
             </a:xfrm>
             <a:custGeom>
               <a:avLst/>
               <a:pathLst>
-                <a:path w="4130307" h="0">
+                <a:path w="3968069" h="0">
                   <a:moveTo>
                     <a:pt x="0" y="0"/>
                   </a:moveTo>
                   <a:lnTo>
-                    <a:pt x="4130307" y="0"/>
-                  </a:lnTo>
-                  <a:lnTo>
-                    <a:pt x="4130307" y="0"/>
+                    <a:pt x="3968069" y="0"/>
+                  </a:lnTo>
+                  <a:lnTo>
+                    <a:pt x="3968069" y="0"/>
                   </a:lnTo>
                 </a:path>
               </a:pathLst>
@@ -3391,21 +3391,21 @@
           </p:nvSpPr>
           <p:spPr>
             <a:xfrm>
-              <a:off x="1531823" y="2623066"/>
-              <a:ext cx="4130307" cy="0"/>
+              <a:off x="1531664" y="2869472"/>
+              <a:ext cx="3968069" cy="0"/>
             </a:xfrm>
             <a:custGeom>
               <a:avLst/>
               <a:pathLst>
-                <a:path w="4130307" h="0">
+                <a:path w="3968069" h="0">
                   <a:moveTo>
                     <a:pt x="0" y="0"/>
                   </a:moveTo>
                   <a:lnTo>
-                    <a:pt x="4130307" y="0"/>
-                  </a:lnTo>
-                  <a:lnTo>
-                    <a:pt x="4130307" y="0"/>
+                    <a:pt x="3968069" y="0"/>
+                  </a:lnTo>
+                  <a:lnTo>
+                    <a:pt x="3968069" y="0"/>
                   </a:lnTo>
                 </a:path>
               </a:pathLst>
@@ -3434,21 +3434,21 @@
           </p:nvSpPr>
           <p:spPr>
             <a:xfrm>
-              <a:off x="1531823" y="2313806"/>
-              <a:ext cx="4130307" cy="0"/>
+              <a:off x="1531664" y="2499769"/>
+              <a:ext cx="3968069" cy="0"/>
             </a:xfrm>
             <a:custGeom>
               <a:avLst/>
               <a:pathLst>
-                <a:path w="4130307" h="0">
+                <a:path w="3968069" h="0">
                   <a:moveTo>
                     <a:pt x="0" y="0"/>
                   </a:moveTo>
                   <a:lnTo>
-                    <a:pt x="4130307" y="0"/>
-                  </a:lnTo>
-                  <a:lnTo>
-                    <a:pt x="4130307" y="0"/>
+                    <a:pt x="3968069" y="0"/>
+                  </a:lnTo>
+                  <a:lnTo>
+                    <a:pt x="3968069" y="0"/>
                   </a:lnTo>
                 </a:path>
               </a:pathLst>
@@ -3477,21 +3477,21 @@
           </p:nvSpPr>
           <p:spPr>
             <a:xfrm>
-              <a:off x="1531823" y="2004546"/>
-              <a:ext cx="4130307" cy="0"/>
+              <a:off x="1531664" y="2130067"/>
+              <a:ext cx="3968069" cy="0"/>
             </a:xfrm>
             <a:custGeom>
               <a:avLst/>
               <a:pathLst>
-                <a:path w="4130307" h="0">
+                <a:path w="3968069" h="0">
                   <a:moveTo>
                     <a:pt x="0" y="0"/>
                   </a:moveTo>
                   <a:lnTo>
-                    <a:pt x="4130307" y="0"/>
-                  </a:lnTo>
-                  <a:lnTo>
-                    <a:pt x="4130307" y="0"/>
+                    <a:pt x="3968069" y="0"/>
+                  </a:lnTo>
+                  <a:lnTo>
+                    <a:pt x="3968069" y="0"/>
                   </a:lnTo>
                 </a:path>
               </a:pathLst>
@@ -3520,21 +3520,21 @@
           </p:nvSpPr>
           <p:spPr>
             <a:xfrm>
-              <a:off x="1531823" y="1695286"/>
-              <a:ext cx="4130307" cy="0"/>
+              <a:off x="1531664" y="1760364"/>
+              <a:ext cx="3968069" cy="0"/>
             </a:xfrm>
             <a:custGeom>
               <a:avLst/>
               <a:pathLst>
-                <a:path w="4130307" h="0">
+                <a:path w="3968069" h="0">
                   <a:moveTo>
                     <a:pt x="0" y="0"/>
                   </a:moveTo>
                   <a:lnTo>
-                    <a:pt x="4130307" y="0"/>
-                  </a:lnTo>
-                  <a:lnTo>
-                    <a:pt x="4130307" y="0"/>
+                    <a:pt x="3968069" y="0"/>
+                  </a:lnTo>
+                  <a:lnTo>
+                    <a:pt x="3968069" y="0"/>
                   </a:lnTo>
                 </a:path>
               </a:pathLst>
@@ -3563,21 +3563,21 @@
           </p:nvSpPr>
           <p:spPr>
             <a:xfrm>
-              <a:off x="1531823" y="1386026"/>
-              <a:ext cx="4130307" cy="0"/>
+              <a:off x="1531664" y="1390661"/>
+              <a:ext cx="3968069" cy="0"/>
             </a:xfrm>
             <a:custGeom>
               <a:avLst/>
               <a:pathLst>
-                <a:path w="4130307" h="0">
+                <a:path w="3968069" h="0">
                   <a:moveTo>
                     <a:pt x="0" y="0"/>
                   </a:moveTo>
                   <a:lnTo>
-                    <a:pt x="4130307" y="0"/>
-                  </a:lnTo>
-                  <a:lnTo>
-                    <a:pt x="4130307" y="0"/>
+                    <a:pt x="3968069" y="0"/>
+                  </a:lnTo>
+                  <a:lnTo>
+                    <a:pt x="3968069" y="0"/>
                   </a:lnTo>
                 </a:path>
               </a:pathLst>
@@ -3606,21 +3606,21 @@
           </p:nvSpPr>
           <p:spPr>
             <a:xfrm>
-              <a:off x="1531823" y="1076766"/>
-              <a:ext cx="4130307" cy="0"/>
+              <a:off x="1531664" y="1020959"/>
+              <a:ext cx="3968069" cy="0"/>
             </a:xfrm>
             <a:custGeom>
               <a:avLst/>
               <a:pathLst>
-                <a:path w="4130307" h="0">
+                <a:path w="3968069" h="0">
                   <a:moveTo>
                     <a:pt x="0" y="0"/>
                   </a:moveTo>
                   <a:lnTo>
-                    <a:pt x="4130307" y="0"/>
-                  </a:lnTo>
-                  <a:lnTo>
-                    <a:pt x="4130307" y="0"/>
+                    <a:pt x="3968069" y="0"/>
+                  </a:lnTo>
+                  <a:lnTo>
+                    <a:pt x="3968069" y="0"/>
                   </a:lnTo>
                 </a:path>
               </a:pathLst>
@@ -3649,15 +3649,15 @@
           </p:nvSpPr>
           <p:spPr>
             <a:xfrm>
-              <a:off x="1531823" y="983989"/>
-              <a:ext cx="0" cy="3185376"/>
+              <a:off x="1531664" y="983989"/>
+              <a:ext cx="0" cy="3733996"/>
             </a:xfrm>
             <a:custGeom>
               <a:avLst/>
               <a:pathLst>
-                <a:path w="0" h="3185376">
+                <a:path w="0" h="3733996">
                   <a:moveTo>
-                    <a:pt x="0" y="3185376"/>
+                    <a:pt x="0" y="3733996"/>
                   </a:moveTo>
                   <a:lnTo>
                     <a:pt x="0" y="0"/>
@@ -3692,15 +3692,15 @@
           </p:nvSpPr>
           <p:spPr>
             <a:xfrm>
-              <a:off x="1982402" y="983989"/>
-              <a:ext cx="0" cy="3185376"/>
+              <a:off x="1964544" y="983989"/>
+              <a:ext cx="0" cy="3733996"/>
             </a:xfrm>
             <a:custGeom>
               <a:avLst/>
               <a:pathLst>
-                <a:path w="0" h="3185376">
+                <a:path w="0" h="3733996">
                   <a:moveTo>
-                    <a:pt x="0" y="3185376"/>
+                    <a:pt x="0" y="3733996"/>
                   </a:moveTo>
                   <a:lnTo>
                     <a:pt x="0" y="0"/>
@@ -3735,15 +3735,15 @@
           </p:nvSpPr>
           <p:spPr>
             <a:xfrm>
-              <a:off x="2432981" y="983989"/>
-              <a:ext cx="0" cy="3185376"/>
+              <a:off x="2397424" y="983989"/>
+              <a:ext cx="0" cy="3733996"/>
             </a:xfrm>
             <a:custGeom>
               <a:avLst/>
               <a:pathLst>
-                <a:path w="0" h="3185376">
+                <a:path w="0" h="3733996">
                   <a:moveTo>
-                    <a:pt x="0" y="3185376"/>
+                    <a:pt x="0" y="3733996"/>
                   </a:moveTo>
                   <a:lnTo>
                     <a:pt x="0" y="0"/>
@@ -3778,15 +3778,15 @@
           </p:nvSpPr>
           <p:spPr>
             <a:xfrm>
-              <a:off x="2883560" y="983989"/>
-              <a:ext cx="0" cy="3185376"/>
+              <a:off x="2830305" y="983989"/>
+              <a:ext cx="0" cy="3733996"/>
             </a:xfrm>
             <a:custGeom>
               <a:avLst/>
               <a:pathLst>
-                <a:path w="0" h="3185376">
+                <a:path w="0" h="3733996">
                   <a:moveTo>
-                    <a:pt x="0" y="3185376"/>
+                    <a:pt x="0" y="3733996"/>
                   </a:moveTo>
                   <a:lnTo>
                     <a:pt x="0" y="0"/>
@@ -3821,15 +3821,15 @@
           </p:nvSpPr>
           <p:spPr>
             <a:xfrm>
-              <a:off x="3334139" y="983989"/>
-              <a:ext cx="0" cy="3185376"/>
+              <a:off x="3263185" y="983989"/>
+              <a:ext cx="0" cy="3733996"/>
             </a:xfrm>
             <a:custGeom>
               <a:avLst/>
               <a:pathLst>
-                <a:path w="0" h="3185376">
+                <a:path w="0" h="3733996">
                   <a:moveTo>
-                    <a:pt x="0" y="3185376"/>
+                    <a:pt x="0" y="3733996"/>
                   </a:moveTo>
                   <a:lnTo>
                     <a:pt x="0" y="0"/>
@@ -3864,15 +3864,15 @@
           </p:nvSpPr>
           <p:spPr>
             <a:xfrm>
-              <a:off x="3784718" y="983989"/>
-              <a:ext cx="0" cy="3185376"/>
+              <a:off x="3696066" y="983989"/>
+              <a:ext cx="0" cy="3733996"/>
             </a:xfrm>
             <a:custGeom>
               <a:avLst/>
               <a:pathLst>
-                <a:path w="0" h="3185376">
+                <a:path w="0" h="3733996">
                   <a:moveTo>
-                    <a:pt x="0" y="3185376"/>
+                    <a:pt x="0" y="3733996"/>
                   </a:moveTo>
                   <a:lnTo>
                     <a:pt x="0" y="0"/>
@@ -3907,15 +3907,15 @@
           </p:nvSpPr>
           <p:spPr>
             <a:xfrm>
-              <a:off x="4235297" y="983989"/>
-              <a:ext cx="0" cy="3185376"/>
+              <a:off x="4128946" y="983989"/>
+              <a:ext cx="0" cy="3733996"/>
             </a:xfrm>
             <a:custGeom>
               <a:avLst/>
               <a:pathLst>
-                <a:path w="0" h="3185376">
+                <a:path w="0" h="3733996">
                   <a:moveTo>
-                    <a:pt x="0" y="3185376"/>
+                    <a:pt x="0" y="3733996"/>
                   </a:moveTo>
                   <a:lnTo>
                     <a:pt x="0" y="0"/>
@@ -3950,15 +3950,15 @@
           </p:nvSpPr>
           <p:spPr>
             <a:xfrm>
-              <a:off x="4685876" y="983989"/>
-              <a:ext cx="0" cy="3185376"/>
+              <a:off x="4561826" y="983989"/>
+              <a:ext cx="0" cy="3733996"/>
             </a:xfrm>
             <a:custGeom>
               <a:avLst/>
               <a:pathLst>
-                <a:path w="0" h="3185376">
+                <a:path w="0" h="3733996">
                   <a:moveTo>
-                    <a:pt x="0" y="3185376"/>
+                    <a:pt x="0" y="3733996"/>
                   </a:moveTo>
                   <a:lnTo>
                     <a:pt x="0" y="0"/>
@@ -3993,15 +3993,15 @@
           </p:nvSpPr>
           <p:spPr>
             <a:xfrm>
-              <a:off x="5136455" y="983989"/>
-              <a:ext cx="0" cy="3185376"/>
+              <a:off x="4994707" y="983989"/>
+              <a:ext cx="0" cy="3733996"/>
             </a:xfrm>
             <a:custGeom>
               <a:avLst/>
               <a:pathLst>
-                <a:path w="0" h="3185376">
+                <a:path w="0" h="3733996">
                   <a:moveTo>
-                    <a:pt x="0" y="3185376"/>
+                    <a:pt x="0" y="3733996"/>
                   </a:moveTo>
                   <a:lnTo>
                     <a:pt x="0" y="0"/>
@@ -4036,15 +4036,15 @@
           </p:nvSpPr>
           <p:spPr>
             <a:xfrm>
-              <a:off x="5587034" y="983989"/>
-              <a:ext cx="0" cy="3185376"/>
+              <a:off x="5427587" y="983989"/>
+              <a:ext cx="0" cy="3733996"/>
             </a:xfrm>
             <a:custGeom>
               <a:avLst/>
               <a:pathLst>
-                <a:path w="0" h="3185376">
+                <a:path w="0" h="3733996">
                   <a:moveTo>
-                    <a:pt x="0" y="3185376"/>
+                    <a:pt x="0" y="3733996"/>
                   </a:moveTo>
                   <a:lnTo>
                     <a:pt x="0" y="0"/>
@@ -4079,165 +4079,165 @@
           </p:nvSpPr>
           <p:spPr>
             <a:xfrm>
-              <a:off x="1531823" y="1076766"/>
-              <a:ext cx="4055211" cy="1103026"/>
+              <a:off x="1531664" y="1020959"/>
+              <a:ext cx="3895923" cy="1318605"/>
             </a:xfrm>
             <a:custGeom>
               <a:avLst/>
               <a:pathLst>
-                <a:path w="4055211" h="1103026">
+                <a:path w="3895923" h="1318605">
                   <a:moveTo>
                     <a:pt x="0" y="0"/>
                   </a:moveTo>
                   <a:lnTo>
-                    <a:pt x="1727219" y="0"/>
-                  </a:lnTo>
-                  <a:lnTo>
-                    <a:pt x="1727219" y="10308"/>
-                  </a:lnTo>
-                  <a:lnTo>
-                    <a:pt x="1952509" y="10308"/>
-                  </a:lnTo>
-                  <a:lnTo>
-                    <a:pt x="1952509" y="61851"/>
-                  </a:lnTo>
-                  <a:lnTo>
-                    <a:pt x="2027605" y="61851"/>
-                  </a:lnTo>
-                  <a:lnTo>
-                    <a:pt x="2027605" y="103086"/>
-                  </a:lnTo>
-                  <a:lnTo>
-                    <a:pt x="2177798" y="103086"/>
-                  </a:lnTo>
-                  <a:lnTo>
-                    <a:pt x="2177798" y="113395"/>
-                  </a:lnTo>
-                  <a:lnTo>
-                    <a:pt x="2252895" y="113395"/>
-                  </a:lnTo>
-                  <a:lnTo>
-                    <a:pt x="2252895" y="144321"/>
-                  </a:lnTo>
-                  <a:lnTo>
-                    <a:pt x="2327991" y="144321"/>
-                  </a:lnTo>
-                  <a:lnTo>
-                    <a:pt x="2327991" y="185555"/>
-                  </a:lnTo>
-                  <a:lnTo>
-                    <a:pt x="2403088" y="185555"/>
-                  </a:lnTo>
-                  <a:lnTo>
-                    <a:pt x="2403088" y="268025"/>
-                  </a:lnTo>
-                  <a:lnTo>
-                    <a:pt x="2478184" y="268025"/>
-                  </a:lnTo>
-                  <a:lnTo>
-                    <a:pt x="2478184" y="329877"/>
-                  </a:lnTo>
-                  <a:lnTo>
-                    <a:pt x="2553281" y="329877"/>
-                  </a:lnTo>
-                  <a:lnTo>
-                    <a:pt x="2553281" y="391729"/>
-                  </a:lnTo>
-                  <a:lnTo>
-                    <a:pt x="2628377" y="391729"/>
-                  </a:lnTo>
-                  <a:lnTo>
-                    <a:pt x="2628377" y="474198"/>
-                  </a:lnTo>
-                  <a:lnTo>
-                    <a:pt x="2703474" y="474198"/>
-                  </a:lnTo>
-                  <a:lnTo>
-                    <a:pt x="2703474" y="587593"/>
-                  </a:lnTo>
-                  <a:lnTo>
-                    <a:pt x="2778570" y="587593"/>
-                  </a:lnTo>
-                  <a:lnTo>
-                    <a:pt x="2778570" y="670062"/>
-                  </a:lnTo>
-                  <a:lnTo>
-                    <a:pt x="2853667" y="670062"/>
-                  </a:lnTo>
-                  <a:lnTo>
-                    <a:pt x="2853667" y="700988"/>
-                  </a:lnTo>
-                  <a:lnTo>
-                    <a:pt x="2928763" y="700988"/>
-                  </a:lnTo>
-                  <a:lnTo>
-                    <a:pt x="2928763" y="742223"/>
-                  </a:lnTo>
-                  <a:lnTo>
-                    <a:pt x="3003860" y="742223"/>
-                  </a:lnTo>
-                  <a:lnTo>
-                    <a:pt x="3003860" y="804075"/>
-                  </a:lnTo>
-                  <a:lnTo>
-                    <a:pt x="3078956" y="804075"/>
-                  </a:lnTo>
-                  <a:lnTo>
-                    <a:pt x="3078956" y="824692"/>
-                  </a:lnTo>
-                  <a:lnTo>
-                    <a:pt x="3229149" y="824692"/>
-                  </a:lnTo>
-                  <a:lnTo>
-                    <a:pt x="3229149" y="845310"/>
-                  </a:lnTo>
-                  <a:lnTo>
-                    <a:pt x="3304246" y="845310"/>
-                  </a:lnTo>
-                  <a:lnTo>
-                    <a:pt x="3304246" y="865927"/>
-                  </a:lnTo>
-                  <a:lnTo>
-                    <a:pt x="3379342" y="865927"/>
-                  </a:lnTo>
-                  <a:lnTo>
-                    <a:pt x="3379342" y="927779"/>
-                  </a:lnTo>
-                  <a:lnTo>
-                    <a:pt x="3454439" y="927779"/>
-                  </a:lnTo>
-                  <a:lnTo>
-                    <a:pt x="3454439" y="938088"/>
-                  </a:lnTo>
-                  <a:lnTo>
-                    <a:pt x="3529535" y="938088"/>
-                  </a:lnTo>
-                  <a:lnTo>
-                    <a:pt x="3529535" y="979322"/>
-                  </a:lnTo>
-                  <a:lnTo>
-                    <a:pt x="3604632" y="979322"/>
-                  </a:lnTo>
-                  <a:lnTo>
-                    <a:pt x="3604632" y="1041174"/>
-                  </a:lnTo>
-                  <a:lnTo>
-                    <a:pt x="3679728" y="1041174"/>
-                  </a:lnTo>
-                  <a:lnTo>
-                    <a:pt x="3679728" y="1072100"/>
-                  </a:lnTo>
-                  <a:lnTo>
-                    <a:pt x="3754825" y="1072100"/>
-                  </a:lnTo>
-                  <a:lnTo>
-                    <a:pt x="3754825" y="1092718"/>
-                  </a:lnTo>
-                  <a:lnTo>
-                    <a:pt x="4055211" y="1092718"/>
-                  </a:lnTo>
-                  <a:lnTo>
-                    <a:pt x="4055211" y="1103026"/>
+                    <a:pt x="1659374" y="0"/>
+                  </a:lnTo>
+                  <a:lnTo>
+                    <a:pt x="1659374" y="12323"/>
+                  </a:lnTo>
+                  <a:lnTo>
+                    <a:pt x="1875814" y="12323"/>
+                  </a:lnTo>
+                  <a:lnTo>
+                    <a:pt x="1875814" y="73940"/>
+                  </a:lnTo>
+                  <a:lnTo>
+                    <a:pt x="1947961" y="73940"/>
+                  </a:lnTo>
+                  <a:lnTo>
+                    <a:pt x="1947961" y="123234"/>
+                  </a:lnTo>
+                  <a:lnTo>
+                    <a:pt x="2092255" y="123234"/>
+                  </a:lnTo>
+                  <a:lnTo>
+                    <a:pt x="2092255" y="135557"/>
+                  </a:lnTo>
+                  <a:lnTo>
+                    <a:pt x="2164401" y="135557"/>
+                  </a:lnTo>
+                  <a:lnTo>
+                    <a:pt x="2164401" y="172527"/>
+                  </a:lnTo>
+                  <a:lnTo>
+                    <a:pt x="2236548" y="172527"/>
+                  </a:lnTo>
+                  <a:lnTo>
+                    <a:pt x="2236548" y="221821"/>
+                  </a:lnTo>
+                  <a:lnTo>
+                    <a:pt x="2308695" y="221821"/>
+                  </a:lnTo>
+                  <a:lnTo>
+                    <a:pt x="2308695" y="320408"/>
+                  </a:lnTo>
+                  <a:lnTo>
+                    <a:pt x="2380841" y="320408"/>
+                  </a:lnTo>
+                  <a:lnTo>
+                    <a:pt x="2380841" y="394349"/>
+                  </a:lnTo>
+                  <a:lnTo>
+                    <a:pt x="2452988" y="394349"/>
+                  </a:lnTo>
+                  <a:lnTo>
+                    <a:pt x="2452988" y="468289"/>
+                  </a:lnTo>
+                  <a:lnTo>
+                    <a:pt x="2525135" y="468289"/>
+                  </a:lnTo>
+                  <a:lnTo>
+                    <a:pt x="2525135" y="566877"/>
+                  </a:lnTo>
+                  <a:lnTo>
+                    <a:pt x="2597282" y="566877"/>
+                  </a:lnTo>
+                  <a:lnTo>
+                    <a:pt x="2597282" y="702434"/>
+                  </a:lnTo>
+                  <a:lnTo>
+                    <a:pt x="2669428" y="702434"/>
+                  </a:lnTo>
+                  <a:lnTo>
+                    <a:pt x="2669428" y="801022"/>
+                  </a:lnTo>
+                  <a:lnTo>
+                    <a:pt x="2741575" y="801022"/>
+                  </a:lnTo>
+                  <a:lnTo>
+                    <a:pt x="2741575" y="837992"/>
+                  </a:lnTo>
+                  <a:lnTo>
+                    <a:pt x="2813722" y="837992"/>
+                  </a:lnTo>
+                  <a:lnTo>
+                    <a:pt x="2813722" y="887286"/>
+                  </a:lnTo>
+                  <a:lnTo>
+                    <a:pt x="2885869" y="887286"/>
+                  </a:lnTo>
+                  <a:lnTo>
+                    <a:pt x="2885869" y="961226"/>
+                  </a:lnTo>
+                  <a:lnTo>
+                    <a:pt x="2958015" y="961226"/>
+                  </a:lnTo>
+                  <a:lnTo>
+                    <a:pt x="2958015" y="985873"/>
+                  </a:lnTo>
+                  <a:lnTo>
+                    <a:pt x="3102309" y="985873"/>
+                  </a:lnTo>
+                  <a:lnTo>
+                    <a:pt x="3102309" y="1010520"/>
+                  </a:lnTo>
+                  <a:lnTo>
+                    <a:pt x="3174455" y="1010520"/>
+                  </a:lnTo>
+                  <a:lnTo>
+                    <a:pt x="3174455" y="1035167"/>
+                  </a:lnTo>
+                  <a:lnTo>
+                    <a:pt x="3246602" y="1035167"/>
+                  </a:lnTo>
+                  <a:lnTo>
+                    <a:pt x="3246602" y="1109107"/>
+                  </a:lnTo>
+                  <a:lnTo>
+                    <a:pt x="3318749" y="1109107"/>
+                  </a:lnTo>
+                  <a:lnTo>
+                    <a:pt x="3318749" y="1121431"/>
+                  </a:lnTo>
+                  <a:lnTo>
+                    <a:pt x="3390896" y="1121431"/>
+                  </a:lnTo>
+                  <a:lnTo>
+                    <a:pt x="3390896" y="1170724"/>
+                  </a:lnTo>
+                  <a:lnTo>
+                    <a:pt x="3463042" y="1170724"/>
+                  </a:lnTo>
+                  <a:lnTo>
+                    <a:pt x="3463042" y="1244665"/>
+                  </a:lnTo>
+                  <a:lnTo>
+                    <a:pt x="3535189" y="1244665"/>
+                  </a:lnTo>
+                  <a:lnTo>
+                    <a:pt x="3535189" y="1281635"/>
+                  </a:lnTo>
+                  <a:lnTo>
+                    <a:pt x="3607336" y="1281635"/>
+                  </a:lnTo>
+                  <a:lnTo>
+                    <a:pt x="3607336" y="1306282"/>
+                  </a:lnTo>
+                  <a:lnTo>
+                    <a:pt x="3895923" y="1306282"/>
+                  </a:lnTo>
+                  <a:lnTo>
+                    <a:pt x="3895923" y="1318605"/>
                   </a:lnTo>
                 </a:path>
               </a:pathLst>
@@ -4266,8 +4266,8 @@
           </p:nvSpPr>
           <p:spPr>
             <a:xfrm>
-              <a:off x="5513883" y="2125058"/>
-              <a:ext cx="146301" cy="109470"/>
+              <a:off x="5354481" y="2267053"/>
+              <a:ext cx="146212" cy="127193"/>
             </a:xfrm>
             <a:prstGeom prst="rect">
               <a:avLst/>
@@ -4279,9 +4279,6 @@
             <a:lstStyle/>
             <a:p>
               <a:pPr algn="l" marL="0" marR="0" indent="0">
-                <a:lnSpc>
-                  <a:spcPts val="1374"/>
-                </a:lnSpc>
                 <a:spcBef>
                   <a:spcPts val="0"/>
                 </a:spcBef>
@@ -4290,7 +4287,7 @@
                 </a:spcAft>
               </a:pPr>
               <a:r>
-                <a:rPr sz="1374">
+                <a:rPr sz="1374" i="0" b="0">
                   <a:solidFill>
                     <a:srgbClr val="F8766D">
                       <a:alpha val="100000"/>
@@ -4312,8 +4309,8 @@
           </p:nvSpPr>
           <p:spPr>
             <a:xfrm>
-              <a:off x="1291894" y="4125572"/>
-              <a:ext cx="177298" cy="84529"/>
+              <a:off x="1291823" y="4677248"/>
+              <a:ext cx="177210" cy="81473"/>
             </a:xfrm>
             <a:prstGeom prst="rect">
               <a:avLst/>
@@ -4325,9 +4322,6 @@
             <a:lstStyle/>
             <a:p>
               <a:pPr algn="l" marL="0" marR="0" indent="0">
-                <a:lnSpc>
-                  <a:spcPts val="880"/>
-                </a:lnSpc>
                 <a:spcBef>
                   <a:spcPts val="0"/>
                 </a:spcBef>
@@ -4336,7 +4330,7 @@
                 </a:spcAft>
               </a:pPr>
               <a:r>
-                <a:rPr sz="880">
+                <a:rPr sz="880" i="0" b="0">
                   <a:solidFill>
                     <a:srgbClr val="4D4D4D">
                       <a:alpha val="100000"/>
@@ -4358,8 +4352,8 @@
           </p:nvSpPr>
           <p:spPr>
             <a:xfrm>
-              <a:off x="1220789" y="3816312"/>
-              <a:ext cx="248404" cy="84529"/>
+              <a:off x="1220774" y="4307546"/>
+              <a:ext cx="248259" cy="81473"/>
             </a:xfrm>
             <a:prstGeom prst="rect">
               <a:avLst/>
@@ -4371,9 +4365,6 @@
             <a:lstStyle/>
             <a:p>
               <a:pPr algn="l" marL="0" marR="0" indent="0">
-                <a:lnSpc>
-                  <a:spcPts val="880"/>
-                </a:lnSpc>
                 <a:spcBef>
                   <a:spcPts val="0"/>
                 </a:spcBef>
@@ -4382,7 +4373,7 @@
                 </a:spcAft>
               </a:pPr>
               <a:r>
-                <a:rPr sz="880">
+                <a:rPr sz="880" i="0" b="0">
                   <a:solidFill>
                     <a:srgbClr val="4D4D4D">
                       <a:alpha val="100000"/>
@@ -4404,8 +4395,8 @@
           </p:nvSpPr>
           <p:spPr>
             <a:xfrm>
-              <a:off x="1220789" y="3507052"/>
-              <a:ext cx="248404" cy="84529"/>
+              <a:off x="1220774" y="3937843"/>
+              <a:ext cx="248259" cy="81473"/>
             </a:xfrm>
             <a:prstGeom prst="rect">
               <a:avLst/>
@@ -4417,9 +4408,6 @@
             <a:lstStyle/>
             <a:p>
               <a:pPr algn="l" marL="0" marR="0" indent="0">
-                <a:lnSpc>
-                  <a:spcPts val="880"/>
-                </a:lnSpc>
                 <a:spcBef>
                   <a:spcPts val="0"/>
                 </a:spcBef>
@@ -4428,7 +4416,7 @@
                 </a:spcAft>
               </a:pPr>
               <a:r>
-                <a:rPr sz="880">
+                <a:rPr sz="880" i="0" b="0">
                   <a:solidFill>
                     <a:srgbClr val="4D4D4D">
                       <a:alpha val="100000"/>
@@ -4450,8 +4438,8 @@
           </p:nvSpPr>
           <p:spPr>
             <a:xfrm>
-              <a:off x="1220789" y="3197793"/>
-              <a:ext cx="248404" cy="84529"/>
+              <a:off x="1220774" y="3568141"/>
+              <a:ext cx="248259" cy="81473"/>
             </a:xfrm>
             <a:prstGeom prst="rect">
               <a:avLst/>
@@ -4463,9 +4451,6 @@
             <a:lstStyle/>
             <a:p>
               <a:pPr algn="l" marL="0" marR="0" indent="0">
-                <a:lnSpc>
-                  <a:spcPts val="880"/>
-                </a:lnSpc>
                 <a:spcBef>
                   <a:spcPts val="0"/>
                 </a:spcBef>
@@ -4474,7 +4459,7 @@
                 </a:spcAft>
               </a:pPr>
               <a:r>
-                <a:rPr sz="880">
+                <a:rPr sz="880" i="0" b="0">
                   <a:solidFill>
                     <a:srgbClr val="4D4D4D">
                       <a:alpha val="100000"/>
@@ -4496,8 +4481,8 @@
           </p:nvSpPr>
           <p:spPr>
             <a:xfrm>
-              <a:off x="1220789" y="2888533"/>
-              <a:ext cx="248404" cy="84529"/>
+              <a:off x="1220774" y="3198438"/>
+              <a:ext cx="248259" cy="81473"/>
             </a:xfrm>
             <a:prstGeom prst="rect">
               <a:avLst/>
@@ -4509,9 +4494,6 @@
             <a:lstStyle/>
             <a:p>
               <a:pPr algn="l" marL="0" marR="0" indent="0">
-                <a:lnSpc>
-                  <a:spcPts val="880"/>
-                </a:lnSpc>
                 <a:spcBef>
                   <a:spcPts val="0"/>
                 </a:spcBef>
@@ -4520,7 +4502,7 @@
                 </a:spcAft>
               </a:pPr>
               <a:r>
-                <a:rPr sz="880">
+                <a:rPr sz="880" i="0" b="0">
                   <a:solidFill>
                     <a:srgbClr val="4D4D4D">
                       <a:alpha val="100000"/>
@@ -4542,8 +4524,8 @@
           </p:nvSpPr>
           <p:spPr>
             <a:xfrm>
-              <a:off x="1220789" y="2579273"/>
-              <a:ext cx="248404" cy="84529"/>
+              <a:off x="1220774" y="2828735"/>
+              <a:ext cx="248259" cy="81473"/>
             </a:xfrm>
             <a:prstGeom prst="rect">
               <a:avLst/>
@@ -4555,9 +4537,6 @@
             <a:lstStyle/>
             <a:p>
               <a:pPr algn="l" marL="0" marR="0" indent="0">
-                <a:lnSpc>
-                  <a:spcPts val="880"/>
-                </a:lnSpc>
                 <a:spcBef>
                   <a:spcPts val="0"/>
                 </a:spcBef>
@@ -4566,7 +4545,7 @@
                 </a:spcAft>
               </a:pPr>
               <a:r>
-                <a:rPr sz="880">
+                <a:rPr sz="880" i="0" b="0">
                   <a:solidFill>
                     <a:srgbClr val="4D4D4D">
                       <a:alpha val="100000"/>
@@ -4588,8 +4567,8 @@
           </p:nvSpPr>
           <p:spPr>
             <a:xfrm>
-              <a:off x="1220789" y="2270013"/>
-              <a:ext cx="248404" cy="84529"/>
+              <a:off x="1220774" y="2459033"/>
+              <a:ext cx="248259" cy="81473"/>
             </a:xfrm>
             <a:prstGeom prst="rect">
               <a:avLst/>
@@ -4601,9 +4580,6 @@
             <a:lstStyle/>
             <a:p>
               <a:pPr algn="l" marL="0" marR="0" indent="0">
-                <a:lnSpc>
-                  <a:spcPts val="880"/>
-                </a:lnSpc>
                 <a:spcBef>
                   <a:spcPts val="0"/>
                 </a:spcBef>
@@ -4612,7 +4588,7 @@
                 </a:spcAft>
               </a:pPr>
               <a:r>
-                <a:rPr sz="880">
+                <a:rPr sz="880" i="0" b="0">
                   <a:solidFill>
                     <a:srgbClr val="4D4D4D">
                       <a:alpha val="100000"/>
@@ -4634,8 +4610,8 @@
           </p:nvSpPr>
           <p:spPr>
             <a:xfrm>
-              <a:off x="1220789" y="1960753"/>
-              <a:ext cx="248404" cy="84529"/>
+              <a:off x="1220774" y="2089330"/>
+              <a:ext cx="248259" cy="81473"/>
             </a:xfrm>
             <a:prstGeom prst="rect">
               <a:avLst/>
@@ -4647,9 +4623,6 @@
             <a:lstStyle/>
             <a:p>
               <a:pPr algn="l" marL="0" marR="0" indent="0">
-                <a:lnSpc>
-                  <a:spcPts val="880"/>
-                </a:lnSpc>
                 <a:spcBef>
                   <a:spcPts val="0"/>
                 </a:spcBef>
@@ -4658,7 +4631,7 @@
                 </a:spcAft>
               </a:pPr>
               <a:r>
-                <a:rPr sz="880">
+                <a:rPr sz="880" i="0" b="0">
                   <a:solidFill>
                     <a:srgbClr val="4D4D4D">
                       <a:alpha val="100000"/>
@@ -4680,8 +4653,8 @@
           </p:nvSpPr>
           <p:spPr>
             <a:xfrm>
-              <a:off x="1220789" y="1651493"/>
-              <a:ext cx="248404" cy="84529"/>
+              <a:off x="1220774" y="1719628"/>
+              <a:ext cx="248259" cy="81473"/>
             </a:xfrm>
             <a:prstGeom prst="rect">
               <a:avLst/>
@@ -4693,9 +4666,6 @@
             <a:lstStyle/>
             <a:p>
               <a:pPr algn="l" marL="0" marR="0" indent="0">
-                <a:lnSpc>
-                  <a:spcPts val="880"/>
-                </a:lnSpc>
                 <a:spcBef>
                   <a:spcPts val="0"/>
                 </a:spcBef>
@@ -4704,7 +4674,7 @@
                 </a:spcAft>
               </a:pPr>
               <a:r>
-                <a:rPr sz="880">
+                <a:rPr sz="880" i="0" b="0">
                   <a:solidFill>
                     <a:srgbClr val="4D4D4D">
                       <a:alpha val="100000"/>
@@ -4726,8 +4696,8 @@
           </p:nvSpPr>
           <p:spPr>
             <a:xfrm>
-              <a:off x="1220789" y="1342234"/>
-              <a:ext cx="248404" cy="84529"/>
+              <a:off x="1220774" y="1349925"/>
+              <a:ext cx="248259" cy="81473"/>
             </a:xfrm>
             <a:prstGeom prst="rect">
               <a:avLst/>
@@ -4739,9 +4709,6 @@
             <a:lstStyle/>
             <a:p>
               <a:pPr algn="l" marL="0" marR="0" indent="0">
-                <a:lnSpc>
-                  <a:spcPts val="880"/>
-                </a:lnSpc>
                 <a:spcBef>
                   <a:spcPts val="0"/>
                 </a:spcBef>
@@ -4750,7 +4717,7 @@
                 </a:spcAft>
               </a:pPr>
               <a:r>
-                <a:rPr sz="880">
+                <a:rPr sz="880" i="0" b="0">
                   <a:solidFill>
                     <a:srgbClr val="4D4D4D">
                       <a:alpha val="100000"/>
@@ -4772,8 +4739,8 @@
           </p:nvSpPr>
           <p:spPr>
             <a:xfrm>
-              <a:off x="1149684" y="1032974"/>
-              <a:ext cx="319509" cy="84529"/>
+              <a:off x="1149725" y="980222"/>
+              <a:ext cx="319308" cy="81473"/>
             </a:xfrm>
             <a:prstGeom prst="rect">
               <a:avLst/>
@@ -4785,9 +4752,6 @@
             <a:lstStyle/>
             <a:p>
               <a:pPr algn="l" marL="0" marR="0" indent="0">
-                <a:lnSpc>
-                  <a:spcPts val="880"/>
-                </a:lnSpc>
                 <a:spcBef>
                   <a:spcPts val="0"/>
                 </a:spcBef>
@@ -4796,7 +4760,7 @@
                 </a:spcAft>
               </a:pPr>
               <a:r>
-                <a:rPr sz="880">
+                <a:rPr sz="880" i="0" b="0">
                   <a:solidFill>
                     <a:srgbClr val="4D4D4D">
                       <a:alpha val="100000"/>
@@ -4818,7 +4782,7 @@
           </p:nvSpPr>
           <p:spPr>
             <a:xfrm>
-              <a:off x="1497028" y="4169365"/>
+              <a:off x="1496869" y="4717985"/>
               <a:ext cx="34794" cy="0"/>
             </a:xfrm>
             <a:custGeom>
@@ -4858,7 +4822,7 @@
           </p:nvSpPr>
           <p:spPr>
             <a:xfrm>
-              <a:off x="1497028" y="3860105"/>
+              <a:off x="1496869" y="4348282"/>
               <a:ext cx="34794" cy="0"/>
             </a:xfrm>
             <a:custGeom>
@@ -4898,7 +4862,7 @@
           </p:nvSpPr>
           <p:spPr>
             <a:xfrm>
-              <a:off x="1497028" y="3550845"/>
+              <a:off x="1496869" y="3978580"/>
               <a:ext cx="34794" cy="0"/>
             </a:xfrm>
             <a:custGeom>
@@ -4938,7 +4902,7 @@
           </p:nvSpPr>
           <p:spPr>
             <a:xfrm>
-              <a:off x="1497028" y="3241585"/>
+              <a:off x="1496869" y="3608877"/>
               <a:ext cx="34794" cy="0"/>
             </a:xfrm>
             <a:custGeom>
@@ -4978,7 +4942,7 @@
           </p:nvSpPr>
           <p:spPr>
             <a:xfrm>
-              <a:off x="1497028" y="2932325"/>
+              <a:off x="1496869" y="3239174"/>
               <a:ext cx="34794" cy="0"/>
             </a:xfrm>
             <a:custGeom>
@@ -5018,7 +4982,7 @@
           </p:nvSpPr>
           <p:spPr>
             <a:xfrm>
-              <a:off x="1497028" y="2623066"/>
+              <a:off x="1496869" y="2869472"/>
               <a:ext cx="34794" cy="0"/>
             </a:xfrm>
             <a:custGeom>
@@ -5058,7 +5022,7 @@
           </p:nvSpPr>
           <p:spPr>
             <a:xfrm>
-              <a:off x="1497028" y="2313806"/>
+              <a:off x="1496869" y="2499769"/>
               <a:ext cx="34794" cy="0"/>
             </a:xfrm>
             <a:custGeom>
@@ -5098,7 +5062,7 @@
           </p:nvSpPr>
           <p:spPr>
             <a:xfrm>
-              <a:off x="1497028" y="2004546"/>
+              <a:off x="1496869" y="2130067"/>
               <a:ext cx="34794" cy="0"/>
             </a:xfrm>
             <a:custGeom>
@@ -5138,7 +5102,7 @@
           </p:nvSpPr>
           <p:spPr>
             <a:xfrm>
-              <a:off x="1497028" y="1695286"/>
+              <a:off x="1496869" y="1760364"/>
               <a:ext cx="34794" cy="0"/>
             </a:xfrm>
             <a:custGeom>
@@ -5178,7 +5142,7 @@
           </p:nvSpPr>
           <p:spPr>
             <a:xfrm>
-              <a:off x="1497028" y="1386026"/>
+              <a:off x="1496869" y="1390661"/>
               <a:ext cx="34794" cy="0"/>
             </a:xfrm>
             <a:custGeom>
@@ -5218,7 +5182,7 @@
           </p:nvSpPr>
           <p:spPr>
             <a:xfrm>
-              <a:off x="1497028" y="1076766"/>
+              <a:off x="1496869" y="1020959"/>
               <a:ext cx="34794" cy="0"/>
             </a:xfrm>
             <a:custGeom>
@@ -5258,7 +5222,7 @@
           </p:nvSpPr>
           <p:spPr>
             <a:xfrm>
-              <a:off x="1531823" y="4169365"/>
+              <a:off x="1531664" y="4717985"/>
               <a:ext cx="0" cy="34794"/>
             </a:xfrm>
             <a:custGeom>
@@ -5298,7 +5262,7 @@
           </p:nvSpPr>
           <p:spPr>
             <a:xfrm>
-              <a:off x="1982402" y="4169365"/>
+              <a:off x="1964544" y="4717985"/>
               <a:ext cx="0" cy="34794"/>
             </a:xfrm>
             <a:custGeom>
@@ -5338,7 +5302,7 @@
           </p:nvSpPr>
           <p:spPr>
             <a:xfrm>
-              <a:off x="2432981" y="4169365"/>
+              <a:off x="2397424" y="4717985"/>
               <a:ext cx="0" cy="34794"/>
             </a:xfrm>
             <a:custGeom>
@@ -5378,7 +5342,7 @@
           </p:nvSpPr>
           <p:spPr>
             <a:xfrm>
-              <a:off x="2883560" y="4169365"/>
+              <a:off x="2830305" y="4717985"/>
               <a:ext cx="0" cy="34794"/>
             </a:xfrm>
             <a:custGeom>
@@ -5418,7 +5382,7 @@
           </p:nvSpPr>
           <p:spPr>
             <a:xfrm>
-              <a:off x="3334139" y="4169365"/>
+              <a:off x="3263185" y="4717985"/>
               <a:ext cx="0" cy="34794"/>
             </a:xfrm>
             <a:custGeom>
@@ -5458,7 +5422,7 @@
           </p:nvSpPr>
           <p:spPr>
             <a:xfrm>
-              <a:off x="3784718" y="4169365"/>
+              <a:off x="3696066" y="4717985"/>
               <a:ext cx="0" cy="34794"/>
             </a:xfrm>
             <a:custGeom>
@@ -5498,7 +5462,7 @@
           </p:nvSpPr>
           <p:spPr>
             <a:xfrm>
-              <a:off x="4235297" y="4169365"/>
+              <a:off x="4128946" y="4717985"/>
               <a:ext cx="0" cy="34794"/>
             </a:xfrm>
             <a:custGeom>
@@ -5538,7 +5502,7 @@
           </p:nvSpPr>
           <p:spPr>
             <a:xfrm>
-              <a:off x="4685876" y="4169365"/>
+              <a:off x="4561826" y="4717985"/>
               <a:ext cx="0" cy="34794"/>
             </a:xfrm>
             <a:custGeom>
@@ -5578,7 +5542,7 @@
           </p:nvSpPr>
           <p:spPr>
             <a:xfrm>
-              <a:off x="5136455" y="4169365"/>
+              <a:off x="4994707" y="4717985"/>
               <a:ext cx="0" cy="34794"/>
             </a:xfrm>
             <a:custGeom>
@@ -5618,7 +5582,7 @@
           </p:nvSpPr>
           <p:spPr>
             <a:xfrm>
-              <a:off x="5587034" y="4169365"/>
+              <a:off x="5427587" y="4717985"/>
               <a:ext cx="0" cy="34794"/>
             </a:xfrm>
             <a:custGeom>
@@ -5658,8 +5622,8 @@
           </p:nvSpPr>
           <p:spPr>
             <a:xfrm>
-              <a:off x="1496270" y="4228939"/>
-              <a:ext cx="71105" cy="84529"/>
+              <a:off x="1496139" y="4780615"/>
+              <a:ext cx="71048" cy="81473"/>
             </a:xfrm>
             <a:prstGeom prst="rect">
               <a:avLst/>
@@ -5671,9 +5635,6 @@
             <a:lstStyle/>
             <a:p>
               <a:pPr algn="l" marL="0" marR="0" indent="0">
-                <a:lnSpc>
-                  <a:spcPts val="880"/>
-                </a:lnSpc>
                 <a:spcBef>
                   <a:spcPts val="0"/>
                 </a:spcBef>
@@ -5682,7 +5643,7 @@
                 </a:spcAft>
               </a:pPr>
               <a:r>
-                <a:rPr sz="880">
+                <a:rPr sz="880" i="0" b="0">
                   <a:solidFill>
                     <a:srgbClr val="4D4D4D">
                       <a:alpha val="100000"/>
@@ -5704,8 +5665,8 @@
           </p:nvSpPr>
           <p:spPr>
             <a:xfrm>
-              <a:off x="1946849" y="4228939"/>
-              <a:ext cx="71105" cy="84529"/>
+              <a:off x="1929020" y="4780615"/>
+              <a:ext cx="71048" cy="81473"/>
             </a:xfrm>
             <a:prstGeom prst="rect">
               <a:avLst/>
@@ -5717,9 +5678,6 @@
             <a:lstStyle/>
             <a:p>
               <a:pPr algn="l" marL="0" marR="0" indent="0">
-                <a:lnSpc>
-                  <a:spcPts val="880"/>
-                </a:lnSpc>
                 <a:spcBef>
                   <a:spcPts val="0"/>
                 </a:spcBef>
@@ -5728,7 +5686,7 @@
                 </a:spcAft>
               </a:pPr>
               <a:r>
-                <a:rPr sz="880">
+                <a:rPr sz="880" i="0" b="0">
                   <a:solidFill>
                     <a:srgbClr val="4D4D4D">
                       <a:alpha val="100000"/>
@@ -5750,8 +5708,8 @@
           </p:nvSpPr>
           <p:spPr>
             <a:xfrm>
-              <a:off x="2361876" y="4230522"/>
-              <a:ext cx="142210" cy="82946"/>
+              <a:off x="2326376" y="4780615"/>
+              <a:ext cx="142097" cy="81473"/>
             </a:xfrm>
             <a:prstGeom prst="rect">
               <a:avLst/>
@@ -5763,9 +5721,6 @@
             <a:lstStyle/>
             <a:p>
               <a:pPr algn="l" marL="0" marR="0" indent="0">
-                <a:lnSpc>
-                  <a:spcPts val="880"/>
-                </a:lnSpc>
                 <a:spcBef>
                   <a:spcPts val="0"/>
                 </a:spcBef>
@@ -5774,7 +5729,7 @@
                 </a:spcAft>
               </a:pPr>
               <a:r>
-                <a:rPr sz="880">
+                <a:rPr sz="880" i="0" b="0">
                   <a:solidFill>
                     <a:srgbClr val="4D4D4D">
                       <a:alpha val="100000"/>
@@ -5796,8 +5751,8 @@
           </p:nvSpPr>
           <p:spPr>
             <a:xfrm>
-              <a:off x="2812455" y="4228939"/>
-              <a:ext cx="142210" cy="84529"/>
+              <a:off x="2759256" y="4780615"/>
+              <a:ext cx="142097" cy="81473"/>
             </a:xfrm>
             <a:prstGeom prst="rect">
               <a:avLst/>
@@ -5809,9 +5764,6 @@
             <a:lstStyle/>
             <a:p>
               <a:pPr algn="l" marL="0" marR="0" indent="0">
-                <a:lnSpc>
-                  <a:spcPts val="880"/>
-                </a:lnSpc>
                 <a:spcBef>
                   <a:spcPts val="0"/>
                 </a:spcBef>
@@ -5820,7 +5772,7 @@
                 </a:spcAft>
               </a:pPr>
               <a:r>
-                <a:rPr sz="880">
+                <a:rPr sz="880" i="0" b="0">
                   <a:solidFill>
                     <a:srgbClr val="4D4D4D">
                       <a:alpha val="100000"/>
@@ -5842,8 +5794,8 @@
           </p:nvSpPr>
           <p:spPr>
             <a:xfrm>
-              <a:off x="3263034" y="4230522"/>
-              <a:ext cx="142210" cy="82946"/>
+              <a:off x="3192136" y="4780615"/>
+              <a:ext cx="142097" cy="81473"/>
             </a:xfrm>
             <a:prstGeom prst="rect">
               <a:avLst/>
@@ -5855,9 +5807,6 @@
             <a:lstStyle/>
             <a:p>
               <a:pPr algn="l" marL="0" marR="0" indent="0">
-                <a:lnSpc>
-                  <a:spcPts val="880"/>
-                </a:lnSpc>
                 <a:spcBef>
                   <a:spcPts val="0"/>
                 </a:spcBef>
@@ -5866,7 +5815,7 @@
                 </a:spcAft>
               </a:pPr>
               <a:r>
-                <a:rPr sz="880">
+                <a:rPr sz="880" i="0" b="0">
                   <a:solidFill>
                     <a:srgbClr val="4D4D4D">
                       <a:alpha val="100000"/>
@@ -5888,8 +5837,8 @@
           </p:nvSpPr>
           <p:spPr>
             <a:xfrm>
-              <a:off x="3713613" y="4228939"/>
-              <a:ext cx="142210" cy="84529"/>
+              <a:off x="3625017" y="4780615"/>
+              <a:ext cx="142097" cy="81473"/>
             </a:xfrm>
             <a:prstGeom prst="rect">
               <a:avLst/>
@@ -5901,9 +5850,6 @@
             <a:lstStyle/>
             <a:p>
               <a:pPr algn="l" marL="0" marR="0" indent="0">
-                <a:lnSpc>
-                  <a:spcPts val="880"/>
-                </a:lnSpc>
                 <a:spcBef>
                   <a:spcPts val="0"/>
                 </a:spcBef>
@@ -5912,7 +5858,7 @@
                 </a:spcAft>
               </a:pPr>
               <a:r>
-                <a:rPr sz="880">
+                <a:rPr sz="880" i="0" b="0">
                   <a:solidFill>
                     <a:srgbClr val="4D4D4D">
                       <a:alpha val="100000"/>
@@ -5934,8 +5880,8 @@
           </p:nvSpPr>
           <p:spPr>
             <a:xfrm>
-              <a:off x="4164192" y="4228939"/>
-              <a:ext cx="142210" cy="84529"/>
+              <a:off x="4057897" y="4780615"/>
+              <a:ext cx="142097" cy="81473"/>
             </a:xfrm>
             <a:prstGeom prst="rect">
               <a:avLst/>
@@ -5947,9 +5893,6 @@
             <a:lstStyle/>
             <a:p>
               <a:pPr algn="l" marL="0" marR="0" indent="0">
-                <a:lnSpc>
-                  <a:spcPts val="880"/>
-                </a:lnSpc>
                 <a:spcBef>
                   <a:spcPts val="0"/>
                 </a:spcBef>
@@ -5958,7 +5901,7 @@
                 </a:spcAft>
               </a:pPr>
               <a:r>
-                <a:rPr sz="880">
+                <a:rPr sz="880" i="0" b="0">
                   <a:solidFill>
                     <a:srgbClr val="4D4D4D">
                       <a:alpha val="100000"/>
@@ -5980,8 +5923,8 @@
           </p:nvSpPr>
           <p:spPr>
             <a:xfrm>
-              <a:off x="4614771" y="4230522"/>
-              <a:ext cx="142210" cy="82946"/>
+              <a:off x="4490777" y="4780615"/>
+              <a:ext cx="142097" cy="81473"/>
             </a:xfrm>
             <a:prstGeom prst="rect">
               <a:avLst/>
@@ -5993,9 +5936,6 @@
             <a:lstStyle/>
             <a:p>
               <a:pPr algn="l" marL="0" marR="0" indent="0">
-                <a:lnSpc>
-                  <a:spcPts val="880"/>
-                </a:lnSpc>
                 <a:spcBef>
                   <a:spcPts val="0"/>
                 </a:spcBef>
@@ -6004,7 +5944,7 @@
                 </a:spcAft>
               </a:pPr>
               <a:r>
-                <a:rPr sz="880">
+                <a:rPr sz="880" i="0" b="0">
                   <a:solidFill>
                     <a:srgbClr val="4D4D4D">
                       <a:alpha val="100000"/>
@@ -6026,8 +5966,8 @@
           </p:nvSpPr>
           <p:spPr>
             <a:xfrm>
-              <a:off x="5065350" y="4228939"/>
-              <a:ext cx="142210" cy="84529"/>
+              <a:off x="4923658" y="4780615"/>
+              <a:ext cx="142097" cy="81473"/>
             </a:xfrm>
             <a:prstGeom prst="rect">
               <a:avLst/>
@@ -6039,9 +5979,6 @@
             <a:lstStyle/>
             <a:p>
               <a:pPr algn="l" marL="0" marR="0" indent="0">
-                <a:lnSpc>
-                  <a:spcPts val="880"/>
-                </a:lnSpc>
                 <a:spcBef>
                   <a:spcPts val="0"/>
                 </a:spcBef>
@@ -6050,7 +5987,7 @@
                 </a:spcAft>
               </a:pPr>
               <a:r>
-                <a:rPr sz="880">
+                <a:rPr sz="880" i="0" b="0">
                   <a:solidFill>
                     <a:srgbClr val="4D4D4D">
                       <a:alpha val="100000"/>
@@ -6072,8 +6009,8 @@
           </p:nvSpPr>
           <p:spPr>
             <a:xfrm>
-              <a:off x="5515929" y="4230412"/>
-              <a:ext cx="142210" cy="83056"/>
+              <a:off x="5356538" y="4780615"/>
+              <a:ext cx="142097" cy="81473"/>
             </a:xfrm>
             <a:prstGeom prst="rect">
               <a:avLst/>
@@ -6085,9 +6022,6 @@
             <a:lstStyle/>
             <a:p>
               <a:pPr algn="l" marL="0" marR="0" indent="0">
-                <a:lnSpc>
-                  <a:spcPts val="880"/>
-                </a:lnSpc>
                 <a:spcBef>
                   <a:spcPts val="0"/>
                 </a:spcBef>
@@ -6096,7 +6030,7 @@
                 </a:spcAft>
               </a:pPr>
               <a:r>
-                <a:rPr sz="880">
+                <a:rPr sz="880" i="0" b="0">
                   <a:solidFill>
                     <a:srgbClr val="4D4D4D">
                       <a:alpha val="100000"/>
@@ -6118,8 +6052,8 @@
           </p:nvSpPr>
           <p:spPr>
             <a:xfrm>
-              <a:off x="2880400" y="4338154"/>
-              <a:ext cx="1433152" cy="135197"/>
+              <a:off x="2804204" y="4920108"/>
+              <a:ext cx="1422989" cy="101864"/>
             </a:xfrm>
             <a:prstGeom prst="rect">
               <a:avLst/>
@@ -6131,9 +6065,6 @@
             <a:lstStyle/>
             <a:p>
               <a:pPr algn="l" marL="0" marR="0" indent="0">
-                <a:lnSpc>
-                  <a:spcPts val="1100"/>
-                </a:lnSpc>
                 <a:spcBef>
                   <a:spcPts val="0"/>
                 </a:spcBef>
@@ -6142,7 +6073,7 @@
                 </a:spcAft>
               </a:pPr>
               <a:r>
-                <a:rPr sz="1100">
+                <a:rPr sz="1100" i="0" b="0">
                   <a:solidFill>
                     <a:srgbClr val="000000">
                       <a:alpha val="100000"/>
@@ -6151,7 +6082,7 @@
                   <a:latin typeface="DejaVu Sans"/>
                   <a:cs typeface="DejaVu Sans"/>
                 </a:rPr>
-                <a:t>Days Post Challenge</a:t>
+                <a:t>Days post-challenge</a:t>
               </a:r>
             </a:p>
           </p:txBody>
@@ -6164,8 +6095,8 @@
           </p:nvSpPr>
           <p:spPr>
             <a:xfrm rot="-5400000">
-              <a:off x="342412" y="2509078"/>
-              <a:ext cx="1351638" cy="135197"/>
+              <a:off x="358310" y="2800055"/>
+              <a:ext cx="1353220" cy="101864"/>
             </a:xfrm>
             <a:prstGeom prst="rect">
               <a:avLst/>
@@ -6177,9 +6108,6 @@
             <a:lstStyle/>
             <a:p>
               <a:pPr algn="l" marL="0" marR="0" indent="0">
-                <a:lnSpc>
-                  <a:spcPts val="1100"/>
-                </a:lnSpc>
                 <a:spcBef>
                   <a:spcPts val="0"/>
                 </a:spcBef>
@@ -6188,7 +6116,7 @@
                 </a:spcAft>
               </a:pPr>
               <a:r>
-                <a:rPr sz="1100">
+                <a:rPr sz="1100" i="0" b="0">
                   <a:solidFill>
                     <a:srgbClr val="000000">
                       <a:alpha val="100000"/>
@@ -6197,7 +6125,7 @@
                   <a:latin typeface="DejaVu Sans"/>
                   <a:cs typeface="DejaVu Sans"/>
                 </a:rPr>
-                <a:t>Survival Probability</a:t>
+                <a:t>Survival probability</a:t>
               </a:r>
             </a:p>
           </p:txBody>
@@ -6210,8 +6138,8 @@
           </p:nvSpPr>
           <p:spPr>
             <a:xfrm>
-              <a:off x="5801309" y="2297115"/>
-              <a:ext cx="529901" cy="559123"/>
+              <a:off x="5638912" y="2571404"/>
+              <a:ext cx="509418" cy="559165"/>
             </a:xfrm>
             <a:prstGeom prst="rect">
               <a:avLst/>
@@ -6236,8 +6164,8 @@
           </p:nvSpPr>
           <p:spPr>
             <a:xfrm>
-              <a:off x="5870898" y="2381233"/>
-              <a:ext cx="390723" cy="101841"/>
+              <a:off x="5708501" y="2655532"/>
+              <a:ext cx="370240" cy="101864"/>
             </a:xfrm>
             <a:prstGeom prst="rect">
               <a:avLst/>
@@ -6249,9 +6177,6 @@
             <a:lstStyle/>
             <a:p>
               <a:pPr algn="l" marL="0" marR="0" indent="0">
-                <a:lnSpc>
-                  <a:spcPts val="1100"/>
-                </a:lnSpc>
                 <a:spcBef>
                   <a:spcPts val="0"/>
                 </a:spcBef>
@@ -6260,7 +6185,7 @@
                 </a:spcAft>
               </a:pPr>
               <a:r>
-                <a:rPr sz="1100">
+                <a:rPr sz="1100" i="0" b="0">
                   <a:solidFill>
                     <a:srgbClr val="000000">
                       <a:alpha val="100000"/>
@@ -6282,7 +6207,7 @@
           </p:nvSpPr>
           <p:spPr>
             <a:xfrm>
-              <a:off x="5870898" y="2567193"/>
+              <a:off x="5708501" y="2841524"/>
               <a:ext cx="219455" cy="219456"/>
             </a:xfrm>
             <a:prstGeom prst="rect">
@@ -6308,7 +6233,7 @@
           </p:nvSpPr>
           <p:spPr>
             <a:xfrm>
-              <a:off x="5892844" y="2676921"/>
+              <a:off x="5730446" y="2951252"/>
               <a:ext cx="175564" cy="0"/>
             </a:xfrm>
             <a:custGeom>
@@ -6348,8 +6273,8 @@
           </p:nvSpPr>
           <p:spPr>
             <a:xfrm>
-              <a:off x="5907475" y="2622186"/>
-              <a:ext cx="146301" cy="109470"/>
+              <a:off x="5745123" y="2878740"/>
+              <a:ext cx="146212" cy="127193"/>
             </a:xfrm>
             <a:prstGeom prst="rect">
               <a:avLst/>
@@ -6361,9 +6286,6 @@
             <a:lstStyle/>
             <a:p>
               <a:pPr algn="l" marL="0" marR="0" indent="0">
-                <a:lnSpc>
-                  <a:spcPts val="1374"/>
-                </a:lnSpc>
                 <a:spcBef>
                   <a:spcPts val="0"/>
                 </a:spcBef>
@@ -6372,7 +6294,7 @@
                 </a:spcAft>
               </a:pPr>
               <a:r>
-                <a:rPr sz="1374">
+                <a:rPr sz="1374" i="0" b="0">
                   <a:solidFill>
                     <a:srgbClr val="F8766D">
                       <a:alpha val="100000"/>
@@ -6394,8 +6316,8 @@
           </p:nvSpPr>
           <p:spPr>
             <a:xfrm>
-              <a:off x="6159943" y="2636185"/>
-              <a:ext cx="76453" cy="81473"/>
+              <a:off x="5997546" y="2910516"/>
+              <a:ext cx="76443" cy="81473"/>
             </a:xfrm>
             <a:prstGeom prst="rect">
               <a:avLst/>
@@ -6407,9 +6329,6 @@
             <a:lstStyle/>
             <a:p>
               <a:pPr algn="l" marL="0" marR="0" indent="0">
-                <a:lnSpc>
-                  <a:spcPts val="880"/>
-                </a:lnSpc>
                 <a:spcBef>
                   <a:spcPts val="0"/>
                 </a:spcBef>
@@ -6418,7 +6337,7 @@
                 </a:spcAft>
               </a:pPr>
               <a:r>
-                <a:rPr sz="880">
+                <a:rPr sz="880" i="0" b="0">
                   <a:solidFill>
                     <a:srgbClr val="000000">
                       <a:alpha val="100000"/>
